--- a/carpentry/intake-142/PowerPoint/Day-13_2026-11-19_Week-4.pptx
+++ b/carpentry/intake-142/PowerPoint/Day-13_2026-11-19_Week-4.pptx
@@ -5480,7 +5480,7 @@
                 </a:solidFill>
                 <a:latin typeface="Arial"/>
               </a:rPr>
-              <a:t>Textbook  |  page 99</a:t>
+              <a:t>Textbook  |  page 145</a:t>
             </a:r>
           </a:p>
         </p:txBody>
@@ -5528,7 +5528,7 @@
                 </a:solidFill>
                 <a:latin typeface="Arial"/>
               </a:rPr>
-              <a:t>Textbook sections 6.5–6.7 pp.98–101</a:t>
+              <a:t>Textbook sections 6.5–6.7 pp.144–148</a:t>
             </a:r>
           </a:p>
         </p:txBody>
@@ -5600,7 +5600,7 @@
                 </a:solidFill>
                 <a:latin typeface="Arial"/>
               </a:rPr>
-              <a:t>Textbook p.99 • Example 6.8 — Sharing a total in a ratio; classroom math example</a:t>
+              <a:t>Textbook p.145 • Example 6.8 — Sharing a total in a ratio; classroom math example</a:t>
             </a:r>
           </a:p>
         </p:txBody>
@@ -6214,7 +6214,7 @@
                 </a:solidFill>
                 <a:latin typeface="Arial"/>
               </a:rPr>
-              <a:t>Textbook sections 6.5–6.7 pp.98–101</a:t>
+              <a:t>Textbook sections 6.5–6.7 pp.144–148</a:t>
             </a:r>
           </a:p>
         </p:txBody>
@@ -6972,7 +6972,7 @@
                 </a:solidFill>
                 <a:latin typeface="Arial"/>
               </a:rPr>
-              <a:t>Textbook sections 6.5–6.7 pp.98–101</a:t>
+              <a:t>Textbook sections 6.5–6.7 pp.144–148</a:t>
             </a:r>
           </a:p>
         </p:txBody>
@@ -7172,7 +7172,7 @@
                 </a:solidFill>
                 <a:latin typeface="Arial"/>
               </a:rPr>
-              <a:t>Resources: Exercise Book 6A Q14–18 (p.40); 6B Q4,6 (p.41), Q7 (p.42)</a:t>
+              <a:t>Resources: Exercise Book 6A Q14–18 (p.56); 6B Q4,6 (p.57), Q7 (p.58)</a:t>
             </a:r>
           </a:p>
         </p:txBody>
@@ -7786,7 +7786,7 @@
                 </a:solidFill>
                 <a:latin typeface="Arial"/>
               </a:rPr>
-              <a:t>Textbook sections 6.5–6.7 pp.98–101</a:t>
+              <a:t>Textbook sections 6.5–6.7 pp.144–148</a:t>
             </a:r>
           </a:p>
         </p:txBody>
@@ -8517,7 +8517,7 @@
                 </a:solidFill>
                 <a:latin typeface="Arial"/>
               </a:rPr>
-              <a:t>Textbook sections 6.5–6.7 pp.98–101</a:t>
+              <a:t>Textbook sections 6.5–6.7 pp.144–148</a:t>
             </a:r>
           </a:p>
         </p:txBody>
@@ -9299,7 +9299,7 @@
                 </a:solidFill>
                 <a:latin typeface="Arial"/>
               </a:rPr>
-              <a:t>Textbook sections 6.5–6.7 pp.98–101</a:t>
+              <a:t>Textbook sections 6.5–6.7 pp.144–148</a:t>
             </a:r>
           </a:p>
         </p:txBody>
@@ -9499,7 +9499,7 @@
                 </a:solidFill>
                 <a:latin typeface="Arial"/>
               </a:rPr>
-              <a:t>Resources: Exercise Book 6A Q14–18 (p.40); 6B Q4,6 (p.41), Q7 (p.42)</a:t>
+              <a:t>Resources: Exercise Book 6A Q14–18 (p.56); 6B Q4,6 (p.57), Q7 (p.58)</a:t>
             </a:r>
           </a:p>
         </p:txBody>
@@ -10113,7 +10113,7 @@
                 </a:solidFill>
                 <a:latin typeface="Arial"/>
               </a:rPr>
-              <a:t>Textbook sections 6.5–6.7 pp.98–101</a:t>
+              <a:t>Textbook sections 6.5–6.7 pp.144–148</a:t>
             </a:r>
           </a:p>
         </p:txBody>
@@ -10889,7 +10889,7 @@
                 </a:solidFill>
                 <a:latin typeface="Arial"/>
               </a:rPr>
-              <a:t>Textbook sections 6.5–6.7 pp.98–101</a:t>
+              <a:t>Textbook sections 6.5–6.7 pp.144–148</a:t>
             </a:r>
           </a:p>
         </p:txBody>
@@ -11848,7 +11848,7 @@
                 </a:solidFill>
                 <a:latin typeface="Arial"/>
               </a:rPr>
-              <a:t>Textbook sections 6.5–6.7 pp.98–101</a:t>
+              <a:t>Textbook sections 6.5–6.7 pp.144–148</a:t>
             </a:r>
           </a:p>
         </p:txBody>
@@ -12559,7 +12559,7 @@
                 </a:solidFill>
                 <a:latin typeface="Arial"/>
               </a:rPr>
-              <a:t>Textbook sections 6.5–6.7 pp.98–101</a:t>
+              <a:t>Textbook sections 6.5–6.7 pp.144–148</a:t>
             </a:r>
           </a:p>
         </p:txBody>
@@ -16622,7 +16622,7 @@
                 </a:solidFill>
                 <a:latin typeface="Arial"/>
               </a:rPr>
-              <a:t>Textbook sections 6.5–6.7 pp.98–101</a:t>
+              <a:t>Textbook sections 6.5–6.7 pp.144–148</a:t>
             </a:r>
           </a:p>
         </p:txBody>
@@ -16822,7 +16822,7 @@
                 </a:solidFill>
                 <a:latin typeface="Arial"/>
               </a:rPr>
-              <a:t>Resources: Exercise Book 6A Q14–18 (p.40); 6B Q4,6 (p.41), Q7 (p.42)</a:t>
+              <a:t>Resources: Exercise Book 6A Q14–18 (p.56); 6B Q4,6 (p.57), Q7 (p.58)</a:t>
             </a:r>
           </a:p>
         </p:txBody>
@@ -17436,7 +17436,7 @@
                 </a:solidFill>
                 <a:latin typeface="Arial"/>
               </a:rPr>
-              <a:t>Textbook sections 6.5–6.7 pp.98–101</a:t>
+              <a:t>Textbook sections 6.5–6.7 pp.144–148</a:t>
             </a:r>
           </a:p>
         </p:txBody>
@@ -18122,7 +18122,7 @@
                 </a:solidFill>
                 <a:latin typeface="Arial"/>
               </a:rPr>
-              <a:t>Textbook sections 6.5–6.7 pp.98–101</a:t>
+              <a:t>Textbook sections 6.5–6.7 pp.144–148</a:t>
             </a:r>
           </a:p>
         </p:txBody>
@@ -18808,7 +18808,7 @@
                 </a:solidFill>
                 <a:latin typeface="Arial"/>
               </a:rPr>
-              <a:t>Textbook sections 6.5–6.7 pp.98–101</a:t>
+              <a:t>Textbook sections 6.5–6.7 pp.144–148</a:t>
             </a:r>
           </a:p>
         </p:txBody>
@@ -19008,7 +19008,7 @@
                 </a:solidFill>
                 <a:latin typeface="Arial"/>
               </a:rPr>
-              <a:t>Resources: Exercise Book 6A Q14–18 (p.40); 6B Q4,6 (p.41), Q7 (p.42)</a:t>
+              <a:t>Resources: Exercise Book 6A Q14–18 (p.56); 6B Q4,6 (p.57), Q7 (p.58)</a:t>
             </a:r>
           </a:p>
         </p:txBody>
@@ -20287,7 +20287,7 @@
                 </a:solidFill>
                 <a:latin typeface="Arial"/>
               </a:rPr>
-              <a:t>Textbook sections 6.8 pp.102–103; review Chapter 4–6</a:t>
+              <a:t>Textbook sections 6.8 pp.148–150; review Chapter 4–6</a:t>
             </a:r>
           </a:p>
         </p:txBody>
@@ -20487,7 +20487,7 @@
                 </a:solidFill>
                 <a:latin typeface="Arial"/>
               </a:rPr>
-              <a:t>Textbook sections 6.8 pp.102–103; review Chapter 4–6</a:t>
+              <a:t>Textbook sections 6.8 pp.148–150; review Chapter 4–6</a:t>
             </a:r>
           </a:p>
         </p:txBody>
@@ -20535,7 +20535,7 @@
                 </a:solidFill>
                 <a:latin typeface="Arial"/>
               </a:rPr>
-              <a:t>Exercise Book 6A Q19–20 (p.40); 6B Q8 (p.42); 6C Q5,7–8 (p.44)</a:t>
+              <a:t>Exercise Book 6A Q19–20 (p.56); 6B Q8 (p.58); 6C Q5,7–8 (p.60)</a:t>
             </a:r>
           </a:p>
         </p:txBody>
@@ -21197,7 +21197,7 @@
                 </a:solidFill>
                 <a:latin typeface="Arial"/>
               </a:rPr>
-              <a:t>Textbook sections 6.8 pp.102–103; review Chapter 4–6</a:t>
+              <a:t>Textbook sections 6.8 pp.148–150; review Chapter 4–6</a:t>
             </a:r>
           </a:p>
         </p:txBody>
@@ -21397,7 +21397,7 @@
                 </a:solidFill>
                 <a:latin typeface="Arial"/>
               </a:rPr>
-              <a:t>Resources: Exercise Book 6A Q19–20 (p.40); 6B Q8 (p.42); 6C Q5,7–8 (p.44)</a:t>
+              <a:t>Resources: Exercise Book 6A Q19–20 (p.56); 6B Q8 (p.58); 6C Q5,7–8 (p.60)</a:t>
             </a:r>
           </a:p>
         </p:txBody>
@@ -22146,7 +22146,7 @@
                 </a:solidFill>
                 <a:latin typeface="Arial"/>
               </a:rPr>
-              <a:t>Textbook sections 6.8 pp.102–103; review Chapter 4–6</a:t>
+              <a:t>Textbook sections 6.8 pp.148–150; review Chapter 4–6</a:t>
             </a:r>
           </a:p>
         </p:txBody>
@@ -23391,7 +23391,7 @@
                 </a:solidFill>
                 <a:latin typeface="Arial"/>
               </a:rPr>
-              <a:t>Textbook sections 6.8 pp.102–103; review Chapter 4–6</a:t>
+              <a:t>Textbook sections 6.8 pp.148–150; review Chapter 4–6</a:t>
             </a:r>
           </a:p>
         </p:txBody>
@@ -25264,7 +25264,7 @@
                 </a:solidFill>
                 <a:latin typeface="Arial"/>
               </a:rPr>
-              <a:t>Textbook sections 6.5–6.7 pp.98–101</a:t>
+              <a:t>Textbook sections 6.5–6.7 pp.144–148</a:t>
             </a:r>
           </a:p>
         </p:txBody>
@@ -25464,7 +25464,7 @@
                 </a:solidFill>
                 <a:latin typeface="Arial"/>
               </a:rPr>
-              <a:t>Textbook sections 6.5–6.7 pp.98–101</a:t>
+              <a:t>Textbook sections 6.5–6.7 pp.144–148</a:t>
             </a:r>
           </a:p>
         </p:txBody>
@@ -25512,7 +25512,7 @@
                 </a:solidFill>
                 <a:latin typeface="Arial"/>
               </a:rPr>
-              <a:t>Exercise Book 6A Q14–18 (p.40); 6B Q4,6 (p.41), Q7 (p.42)</a:t>
+              <a:t>Exercise Book 6A Q14–18 (p.56); 6B Q4,6 (p.57), Q7 (p.58)</a:t>
             </a:r>
           </a:p>
         </p:txBody>
@@ -26126,7 +26126,7 @@
                 </a:solidFill>
                 <a:latin typeface="Arial"/>
               </a:rPr>
-              <a:t>Textbook  |  page 102</a:t>
+              <a:t>Textbook  |  page 148</a:t>
             </a:r>
           </a:p>
         </p:txBody>
@@ -26174,7 +26174,7 @@
                 </a:solidFill>
                 <a:latin typeface="Arial"/>
               </a:rPr>
-              <a:t>Textbook sections 6.8 pp.102–103; review Chapter 4–6</a:t>
+              <a:t>Textbook sections 6.8 pp.148–150; review Chapter 4–6</a:t>
             </a:r>
           </a:p>
         </p:txBody>
@@ -26246,7 +26246,7 @@
                 </a:solidFill>
                 <a:latin typeface="Arial"/>
               </a:rPr>
-              <a:t>Textbook p.102 • Figure 6.3 — Drawing dimensions and real dimensions</a:t>
+              <a:t>Textbook p.148 • Figure 6.3 — Drawing dimensions and real dimensions</a:t>
             </a:r>
           </a:p>
         </p:txBody>
@@ -26812,7 +26812,7 @@
                 </a:solidFill>
                 <a:latin typeface="Arial"/>
               </a:rPr>
-              <a:t>Textbook  |  page 102</a:t>
+              <a:t>Textbook  |  page 149</a:t>
             </a:r>
           </a:p>
         </p:txBody>
@@ -26860,7 +26860,7 @@
                 </a:solidFill>
                 <a:latin typeface="Arial"/>
               </a:rPr>
-              <a:t>Textbook sections 6.8 pp.102–103; review Chapter 4–6</a:t>
+              <a:t>Textbook sections 6.8 pp.148–150; review Chapter 4–6</a:t>
             </a:r>
           </a:p>
         </p:txBody>
@@ -26932,7 +26932,7 @@
                 </a:solidFill>
                 <a:latin typeface="Arial"/>
               </a:rPr>
-              <a:t>Textbook p.102 • Example 6.11 — Scale factor from drawing to real length</a:t>
+              <a:t>Textbook p.149 • Example 6.11 — Scale factor from drawing to real length</a:t>
             </a:r>
           </a:p>
         </p:txBody>
@@ -27546,7 +27546,7 @@
                 </a:solidFill>
                 <a:latin typeface="Arial"/>
               </a:rPr>
-              <a:t>Textbook sections 6.8 pp.102–103; review Chapter 4–6</a:t>
+              <a:t>Textbook sections 6.8 pp.148–150; review Chapter 4–6</a:t>
             </a:r>
           </a:p>
         </p:txBody>
@@ -28304,7 +28304,7 @@
                 </a:solidFill>
                 <a:latin typeface="Arial"/>
               </a:rPr>
-              <a:t>Textbook sections 6.8 pp.102–103; review Chapter 4–6</a:t>
+              <a:t>Textbook sections 6.8 pp.148–150; review Chapter 4–6</a:t>
             </a:r>
           </a:p>
         </p:txBody>
@@ -28504,7 +28504,7 @@
                 </a:solidFill>
                 <a:latin typeface="Arial"/>
               </a:rPr>
-              <a:t>Resources: Exercise Book 6A Q19–20 (p.40); 6B Q8 (p.42); 6C Q5,7–8 (p.44)</a:t>
+              <a:t>Resources: Exercise Book 6A Q19–20 (p.56); 6B Q8 (p.58); 6C Q5,7–8 (p.60)</a:t>
             </a:r>
           </a:p>
         </p:txBody>
@@ -29118,7 +29118,7 @@
                 </a:solidFill>
                 <a:latin typeface="Arial"/>
               </a:rPr>
-              <a:t>Textbook sections 6.8 pp.102–103; review Chapter 4–6</a:t>
+              <a:t>Textbook sections 6.8 pp.148–150; review Chapter 4–6</a:t>
             </a:r>
           </a:p>
         </p:txBody>
@@ -29874,7 +29874,7 @@
                 </a:solidFill>
                 <a:latin typeface="Arial"/>
               </a:rPr>
-              <a:t>Textbook sections 6.8 pp.102–103; review Chapter 4–6</a:t>
+              <a:t>Textbook sections 6.8 pp.148–150; review Chapter 4–6</a:t>
             </a:r>
           </a:p>
         </p:txBody>
@@ -30608,7 +30608,7 @@
                 </a:solidFill>
                 <a:latin typeface="Arial"/>
               </a:rPr>
-              <a:t>Textbook sections 6.8 pp.102–103; review Chapter 4–6</a:t>
+              <a:t>Textbook sections 6.8 pp.148–150; review Chapter 4–6</a:t>
             </a:r>
           </a:p>
         </p:txBody>
@@ -30808,7 +30808,7 @@
                 </a:solidFill>
                 <a:latin typeface="Arial"/>
               </a:rPr>
-              <a:t>Resources: Exercise Book 6A Q19–20 (p.40); 6B Q8 (p.42); 6C Q5,7–8 (p.44)</a:t>
+              <a:t>Resources: Exercise Book 6A Q19–20 (p.56); 6B Q8 (p.58); 6C Q5,7–8 (p.60)</a:t>
             </a:r>
           </a:p>
         </p:txBody>
@@ -31422,7 +31422,7 @@
                 </a:solidFill>
                 <a:latin typeface="Arial"/>
               </a:rPr>
-              <a:t>Textbook sections 6.8 pp.102–103; review Chapter 4–6</a:t>
+              <a:t>Textbook sections 6.8 pp.148–150; review Chapter 4–6</a:t>
             </a:r>
           </a:p>
         </p:txBody>
@@ -32198,7 +32198,7 @@
                 </a:solidFill>
                 <a:latin typeface="Arial"/>
               </a:rPr>
-              <a:t>Textbook sections 6.8 pp.102–103; review Chapter 4–6</a:t>
+              <a:t>Textbook sections 6.8 pp.148–150; review Chapter 4–6</a:t>
             </a:r>
           </a:p>
         </p:txBody>
@@ -33157,7 +33157,7 @@
                 </a:solidFill>
                 <a:latin typeface="Arial"/>
               </a:rPr>
-              <a:t>Textbook sections 6.8 pp.102–103; review Chapter 4–6</a:t>
+              <a:t>Textbook sections 6.8 pp.148–150; review Chapter 4–6</a:t>
             </a:r>
           </a:p>
         </p:txBody>
@@ -33843,7 +33843,7 @@
                 </a:solidFill>
                 <a:latin typeface="Arial"/>
               </a:rPr>
-              <a:t>Textbook sections 6.5–6.7 pp.98–101</a:t>
+              <a:t>Textbook sections 6.5–6.7 pp.144–148</a:t>
             </a:r>
           </a:p>
         </p:txBody>
@@ -34043,7 +34043,7 @@
                 </a:solidFill>
                 <a:latin typeface="Arial"/>
               </a:rPr>
-              <a:t>Resources: Exercise Book 6A Q14–18 (p.40); 6B Q4,6 (p.41), Q7 (p.42)</a:t>
+              <a:t>Resources: Exercise Book 6A Q14–18 (p.56); 6B Q4,6 (p.57), Q7 (p.58)</a:t>
             </a:r>
           </a:p>
         </p:txBody>
@@ -34657,7 +34657,7 @@
                 </a:solidFill>
                 <a:latin typeface="Arial"/>
               </a:rPr>
-              <a:t>Textbook sections 6.8 pp.102–103; review Chapter 4–6</a:t>
+              <a:t>Textbook sections 6.8 pp.148–150; review Chapter 4–6</a:t>
             </a:r>
           </a:p>
         </p:txBody>
@@ -35343,7 +35343,7 @@
                 </a:solidFill>
                 <a:latin typeface="Arial"/>
               </a:rPr>
-              <a:t>Textbook sections 6.8 pp.102–103; review Chapter 4–6</a:t>
+              <a:t>Textbook sections 6.8 pp.148–150; review Chapter 4–6</a:t>
             </a:r>
           </a:p>
         </p:txBody>
@@ -35543,7 +35543,7 @@
                 </a:solidFill>
                 <a:latin typeface="Arial"/>
               </a:rPr>
-              <a:t>Resources: Exercise Book 6A Q19–20 (p.40); 6B Q8 (p.42); 6C Q5,7–8 (p.44)</a:t>
+              <a:t>Resources: Exercise Book 6A Q19–20 (p.56); 6B Q8 (p.58); 6C Q5,7–8 (p.60)</a:t>
             </a:r>
           </a:p>
         </p:txBody>
@@ -36157,7 +36157,7 @@
                 </a:solidFill>
                 <a:latin typeface="Arial"/>
               </a:rPr>
-              <a:t>Textbook sections 6.8 pp.102–103; review Chapter 4–6</a:t>
+              <a:t>Textbook sections 6.8 pp.148–150; review Chapter 4–6</a:t>
             </a:r>
           </a:p>
         </p:txBody>
@@ -36843,7 +36843,7 @@
                 </a:solidFill>
                 <a:latin typeface="Arial"/>
               </a:rPr>
-              <a:t>Textbook sections 6.8 pp.102–103; review Chapter 4–6</a:t>
+              <a:t>Textbook sections 6.8 pp.148–150; review Chapter 4–6</a:t>
             </a:r>
           </a:p>
         </p:txBody>
@@ -37529,7 +37529,7 @@
                 </a:solidFill>
                 <a:latin typeface="Arial"/>
               </a:rPr>
-              <a:t>Textbook sections 6.8 pp.102–103; review Chapter 4–6</a:t>
+              <a:t>Textbook sections 6.8 pp.148–150; review Chapter 4–6</a:t>
             </a:r>
           </a:p>
         </p:txBody>
@@ -37729,7 +37729,7 @@
                 </a:solidFill>
                 <a:latin typeface="Arial"/>
               </a:rPr>
-              <a:t>Resources: Exercise Book 6A Q19–20 (p.40); 6B Q8 (p.42); 6C Q5,7–8 (p.44)</a:t>
+              <a:t>Resources: Exercise Book 6A Q19–20 (p.56); 6B Q8 (p.58); 6C Q5,7–8 (p.60)</a:t>
             </a:r>
           </a:p>
         </p:txBody>
@@ -38343,7 +38343,7 @@
                 </a:solidFill>
                 <a:latin typeface="Arial"/>
               </a:rPr>
-              <a:t>Textbook sections 6.5–6.7 pp.98–101</a:t>
+              <a:t>Textbook sections 6.5–6.7 pp.144–148</a:t>
             </a:r>
           </a:p>
         </p:txBody>
@@ -39164,7 +39164,7 @@
                 </a:solidFill>
                 <a:latin typeface="Arial"/>
               </a:rPr>
-              <a:t>Textbook sections 6.5–6.7 pp.98–101</a:t>
+              <a:t>Textbook sections 6.5–6.7 pp.144–148</a:t>
             </a:r>
           </a:p>
         </p:txBody>
@@ -40385,7 +40385,7 @@
                 </a:solidFill>
                 <a:latin typeface="Arial"/>
               </a:rPr>
-              <a:t>Textbook sections 6.5–6.7 pp.98–101</a:t>
+              <a:t>Textbook sections 6.5–6.7 pp.144–148</a:t>
             </a:r>
           </a:p>
         </p:txBody>
@@ -42272,7 +42272,7 @@
                 </a:solidFill>
                 <a:latin typeface="Arial"/>
               </a:rPr>
-              <a:t>Textbook  |  page 99</a:t>
+              <a:t>Textbook  |  page 145</a:t>
             </a:r>
           </a:p>
         </p:txBody>
@@ -42320,7 +42320,7 @@
                 </a:solidFill>
                 <a:latin typeface="Arial"/>
               </a:rPr>
-              <a:t>Textbook sections 6.5–6.7 pp.98–101</a:t>
+              <a:t>Textbook sections 6.5–6.7 pp.144–148</a:t>
             </a:r>
           </a:p>
         </p:txBody>
@@ -42392,7 +42392,7 @@
                 </a:solidFill>
                 <a:latin typeface="Arial"/>
               </a:rPr>
-              <a:t>Textbook p.99 • Figure 6.2 — Equal parts in a 4:1 ratio</a:t>
+              <a:t>Textbook p.145 • Figure 6.2 — Equal parts in a 4:1 ratio</a:t>
             </a:r>
           </a:p>
         </p:txBody>

--- a/carpentry/intake-142/PowerPoint/Day-13_2026-11-19_Week-4.pptx
+++ b/carpentry/intake-142/PowerPoint/Day-13_2026-11-19_Week-4.pptx
@@ -19281,6 +19281,104 @@
           </a:p>
         </p:txBody>
       </p:sp>
+      <p:sp>
+        <p:nvSpPr>
+          <p:cNvPr id="22" name="Play quiz W04-L07"/>
+          <p:cNvSpPr txBox="1"/>
+          <p:nvPr/>
+        </p:nvSpPr>
+        <p:spPr>
+          <a:xfrm>
+            <a:off x="6355080" y="6606540"/>
+            <a:ext cx="822960" cy="210312"/>
+          </a:xfrm>
+          <a:prstGeom prst="rect">
+            <a:avLst/>
+          </a:prstGeom>
+          <a:noFill/>
+        </p:spPr>
+        <p:txBody>
+          <a:bodyPr wrap="square" lIns="0" rIns="0" tIns="0" bIns="0" anchor="t">
+            <a:normAutofit fontScale="100000" lnSpcReduction="0"/>
+          </a:bodyPr>
+          <a:lstStyle/>
+          <a:p>
+            <a:pPr>
+              <a:spcBef>
+                <a:spcPts val="0"/>
+              </a:spcBef>
+              <a:spcAft>
+                <a:spcPts val="0"/>
+              </a:spcAft>
+              <a:defRPr sz="1000" b="0">
+                <a:solidFill>
+                  <a:srgbClr val="D0002B"/>
+                </a:solidFill>
+                <a:latin typeface="Arial"/>
+              </a:defRPr>
+            </a:pPr>
+            <a:r>
+              <a:rPr sz="1000">
+                <a:solidFill>
+                  <a:srgbClr val="F7F8FC"/>
+                </a:solidFill>
+                <a:latin typeface="Arial"/>
+                <a:hlinkClick r:id="rId8"/>
+              </a:rPr>
+              <a:t>Play quiz</a:t>
+            </a:r>
+          </a:p>
+        </p:txBody>
+      </p:sp>
+      <p:sp>
+        <p:nvSpPr>
+          <p:cNvPr id="23" name="Quiz PDF W04-L07"/>
+          <p:cNvSpPr txBox="1"/>
+          <p:nvPr/>
+        </p:nvSpPr>
+        <p:spPr>
+          <a:xfrm>
+            <a:off x="7296912" y="6606540"/>
+            <a:ext cx="1005840" cy="210312"/>
+          </a:xfrm>
+          <a:prstGeom prst="rect">
+            <a:avLst/>
+          </a:prstGeom>
+          <a:noFill/>
+        </p:spPr>
+        <p:txBody>
+          <a:bodyPr wrap="square" lIns="0" rIns="0" tIns="0" bIns="0" anchor="t">
+            <a:normAutofit fontScale="100000" lnSpcReduction="0"/>
+          </a:bodyPr>
+          <a:lstStyle/>
+          <a:p>
+            <a:pPr>
+              <a:spcBef>
+                <a:spcPts val="0"/>
+              </a:spcBef>
+              <a:spcAft>
+                <a:spcPts val="0"/>
+              </a:spcAft>
+              <a:defRPr sz="1000" b="0">
+                <a:solidFill>
+                  <a:srgbClr val="D0002B"/>
+                </a:solidFill>
+                <a:latin typeface="Arial"/>
+              </a:defRPr>
+            </a:pPr>
+            <a:r>
+              <a:rPr sz="1000">
+                <a:solidFill>
+                  <a:srgbClr val="F7F8FC"/>
+                </a:solidFill>
+                <a:latin typeface="Arial"/>
+                <a:hlinkClick r:id="rId9"/>
+              </a:rPr>
+              <a:t>Quiz PDF</a:t>
+            </a:r>
+          </a:p>
+        </p:txBody>
+      </p:sp>
     </p:spTree>
   </p:cSld>
   <p:clrMapOvr>
@@ -37998,6 +38096,104 @@
                 <a:latin typeface="Arial"/>
               </a:rPr>
               <a:t>Day 13  •  2026-11-19  •  44</a:t>
+            </a:r>
+          </a:p>
+        </p:txBody>
+      </p:sp>
+      <p:sp>
+        <p:nvSpPr>
+          <p:cNvPr id="22" name="Play quiz W04-L08"/>
+          <p:cNvSpPr txBox="1"/>
+          <p:nvPr/>
+        </p:nvSpPr>
+        <p:spPr>
+          <a:xfrm>
+            <a:off x="6355080" y="6606540"/>
+            <a:ext cx="822960" cy="210312"/>
+          </a:xfrm>
+          <a:prstGeom prst="rect">
+            <a:avLst/>
+          </a:prstGeom>
+          <a:noFill/>
+        </p:spPr>
+        <p:txBody>
+          <a:bodyPr wrap="square" lIns="0" rIns="0" tIns="0" bIns="0" anchor="t">
+            <a:normAutofit fontScale="100000" lnSpcReduction="0"/>
+          </a:bodyPr>
+          <a:lstStyle/>
+          <a:p>
+            <a:pPr>
+              <a:spcBef>
+                <a:spcPts val="0"/>
+              </a:spcBef>
+              <a:spcAft>
+                <a:spcPts val="0"/>
+              </a:spcAft>
+              <a:defRPr sz="1000" b="0">
+                <a:solidFill>
+                  <a:srgbClr val="D0002B"/>
+                </a:solidFill>
+                <a:latin typeface="Arial"/>
+              </a:defRPr>
+            </a:pPr>
+            <a:r>
+              <a:rPr sz="1000">
+                <a:solidFill>
+                  <a:srgbClr val="F7F8FC"/>
+                </a:solidFill>
+                <a:latin typeface="Arial"/>
+                <a:hlinkClick r:id="rId8"/>
+              </a:rPr>
+              <a:t>Play quiz</a:t>
+            </a:r>
+          </a:p>
+        </p:txBody>
+      </p:sp>
+      <p:sp>
+        <p:nvSpPr>
+          <p:cNvPr id="23" name="Quiz PDF W04-L08"/>
+          <p:cNvSpPr txBox="1"/>
+          <p:nvPr/>
+        </p:nvSpPr>
+        <p:spPr>
+          <a:xfrm>
+            <a:off x="7296912" y="6606540"/>
+            <a:ext cx="1005840" cy="210312"/>
+          </a:xfrm>
+          <a:prstGeom prst="rect">
+            <a:avLst/>
+          </a:prstGeom>
+          <a:noFill/>
+        </p:spPr>
+        <p:txBody>
+          <a:bodyPr wrap="square" lIns="0" rIns="0" tIns="0" bIns="0" anchor="t">
+            <a:normAutofit fontScale="100000" lnSpcReduction="0"/>
+          </a:bodyPr>
+          <a:lstStyle/>
+          <a:p>
+            <a:pPr>
+              <a:spcBef>
+                <a:spcPts val="0"/>
+              </a:spcBef>
+              <a:spcAft>
+                <a:spcPts val="0"/>
+              </a:spcAft>
+              <a:defRPr sz="1000" b="0">
+                <a:solidFill>
+                  <a:srgbClr val="D0002B"/>
+                </a:solidFill>
+                <a:latin typeface="Arial"/>
+              </a:defRPr>
+            </a:pPr>
+            <a:r>
+              <a:rPr sz="1000">
+                <a:solidFill>
+                  <a:srgbClr val="F7F8FC"/>
+                </a:solidFill>
+                <a:latin typeface="Arial"/>
+                <a:hlinkClick r:id="rId9"/>
+              </a:rPr>
+              <a:t>Quiz PDF</a:t>
             </a:r>
           </a:p>
         </p:txBody>
